--- a/native/HDDS_UI상세설계서_유형대표_V1.0.pptx
+++ b/native/HDDS_UI상세설계서_유형대표_V1.0.pptx
@@ -3406,8 +3406,8 @@
         </p:nvSpPr>
         <p:spPr>
           <a:xfrm>
-            <a:off x="975335" y="2880360"/>
-            <a:ext cx="10241023" cy="548640"/>
+            <a:off x="487667" y="137160"/>
+            <a:ext cx="4876678" cy="308610"/>
           </a:xfrm>
           <a:prstGeom prst="rect">
             <a:avLst/>
@@ -3422,7 +3422,7 @@
           <a:p>
             <a:pPr algn="l"/>
             <a:r>
-              <a:rPr sz="1300" b="1">
+              <a:rPr sz="1000" b="1">
                 <a:solidFill>
                   <a:srgbClr val="767676"/>
                 </a:solidFill>
@@ -3441,8 +3441,8 @@
         </p:nvSpPr>
         <p:spPr>
           <a:xfrm>
-            <a:off x="975335" y="3223260"/>
-            <a:ext cx="10241023" cy="685800"/>
+            <a:off x="1463003" y="3154680"/>
+            <a:ext cx="9265688" cy="822960"/>
           </a:xfrm>
           <a:prstGeom prst="rect">
             <a:avLst/>
@@ -3455,9 +3455,9 @@
           </a:bodyPr>
           <a:lstStyle/>
           <a:p>
-            <a:pPr algn="l"/>
-            <a:r>
-              <a:rPr sz="2600" b="1">
+            <a:pPr algn="ctr"/>
+            <a:r>
+              <a:rPr sz="2800" b="1">
                 <a:solidFill>
                   <a:srgbClr val="1A1A1A"/>
                 </a:solidFill>
@@ -3465,6 +3465,50 @@
               </a:rPr>
               <a:t>5. 콘텐츠 상세형 — 대표 HDP-BRD0103</a:t>
             </a:r>
+          </a:p>
+        </p:txBody>
+      </p:sp>
+      <p:sp>
+        <p:nvSpPr>
+          <p:cNvPr id="5" name="Rectangle 4"/>
+          <p:cNvSpPr/>
+          <p:nvPr/>
+        </p:nvSpPr>
+        <p:spPr>
+          <a:xfrm>
+            <a:off x="5608179" y="4114800"/>
+            <a:ext cx="975335" cy="27432"/>
+          </a:xfrm>
+          <a:prstGeom prst="rect">
+            <a:avLst/>
+          </a:prstGeom>
+          <a:solidFill>
+            <a:srgbClr val="1A1A1A"/>
+          </a:solidFill>
+          <a:ln>
+            <a:noFill/>
+          </a:ln>
+          <a:effectLst/>
+        </p:spPr>
+        <p:style>
+          <a:lnRef idx="1">
+            <a:schemeClr val="accent1"/>
+          </a:lnRef>
+          <a:fillRef idx="3">
+            <a:schemeClr val="accent1"/>
+          </a:fillRef>
+          <a:effectRef idx="2">
+            <a:schemeClr val="accent1"/>
+          </a:effectRef>
+          <a:fontRef idx="minor">
+            <a:schemeClr val="lt1"/>
+          </a:fontRef>
+        </p:style>
+        <p:txBody>
+          <a:bodyPr rtlCol="0" anchor="ctr"/>
+          <a:lstStyle/>
+          <a:p>
+            <a:pPr algn="ctr"/>
           </a:p>
         </p:txBody>
       </p:sp>
@@ -6597,8 +6641,8 @@
         </p:nvSpPr>
         <p:spPr>
           <a:xfrm>
-            <a:off x="975335" y="2880360"/>
-            <a:ext cx="10241023" cy="548640"/>
+            <a:off x="487667" y="137160"/>
+            <a:ext cx="4876678" cy="308610"/>
           </a:xfrm>
           <a:prstGeom prst="rect">
             <a:avLst/>
@@ -6613,7 +6657,7 @@
           <a:p>
             <a:pPr algn="l"/>
             <a:r>
-              <a:rPr sz="1300" b="1">
+              <a:rPr sz="1000" b="1">
                 <a:solidFill>
                   <a:srgbClr val="767676"/>
                 </a:solidFill>
@@ -6632,8 +6676,8 @@
         </p:nvSpPr>
         <p:spPr>
           <a:xfrm>
-            <a:off x="975335" y="3223260"/>
-            <a:ext cx="10241023" cy="685800"/>
+            <a:off x="1463003" y="3154680"/>
+            <a:ext cx="9265688" cy="822960"/>
           </a:xfrm>
           <a:prstGeom prst="rect">
             <a:avLst/>
@@ -6646,9 +6690,9 @@
           </a:bodyPr>
           <a:lstStyle/>
           <a:p>
-            <a:pPr algn="l"/>
-            <a:r>
-              <a:rPr sz="2600" b="1">
+            <a:pPr algn="ctr"/>
+            <a:r>
+              <a:rPr sz="2800" b="1">
                 <a:solidFill>
                   <a:srgbClr val="1A1A1A"/>
                 </a:solidFill>
@@ -6656,6 +6700,50 @@
               </a:rPr>
               <a:t>6. 프로세스형 — 대표 HDP-CRD0150</a:t>
             </a:r>
+          </a:p>
+        </p:txBody>
+      </p:sp>
+      <p:sp>
+        <p:nvSpPr>
+          <p:cNvPr id="5" name="Rectangle 4"/>
+          <p:cNvSpPr/>
+          <p:nvPr/>
+        </p:nvSpPr>
+        <p:spPr>
+          <a:xfrm>
+            <a:off x="5608179" y="4114800"/>
+            <a:ext cx="975335" cy="27432"/>
+          </a:xfrm>
+          <a:prstGeom prst="rect">
+            <a:avLst/>
+          </a:prstGeom>
+          <a:solidFill>
+            <a:srgbClr val="1A1A1A"/>
+          </a:solidFill>
+          <a:ln>
+            <a:noFill/>
+          </a:ln>
+          <a:effectLst/>
+        </p:spPr>
+        <p:style>
+          <a:lnRef idx="1">
+            <a:schemeClr val="accent1"/>
+          </a:lnRef>
+          <a:fillRef idx="3">
+            <a:schemeClr val="accent1"/>
+          </a:fillRef>
+          <a:effectRef idx="2">
+            <a:schemeClr val="accent1"/>
+          </a:effectRef>
+          <a:fontRef idx="minor">
+            <a:schemeClr val="lt1"/>
+          </a:fontRef>
+        </p:style>
+        <p:txBody>
+          <a:bodyPr rtlCol="0" anchor="ctr"/>
+          <a:lstStyle/>
+          <a:p>
+            <a:pPr algn="ctr"/>
           </a:p>
         </p:txBody>
       </p:sp>
@@ -9920,8 +10008,8 @@
         </p:nvSpPr>
         <p:spPr>
           <a:xfrm>
-            <a:off x="975335" y="2880360"/>
-            <a:ext cx="10241023" cy="548640"/>
+            <a:off x="487667" y="137160"/>
+            <a:ext cx="4876678" cy="308610"/>
           </a:xfrm>
           <a:prstGeom prst="rect">
             <a:avLst/>
@@ -9936,7 +10024,7 @@
           <a:p>
             <a:pPr algn="l"/>
             <a:r>
-              <a:rPr sz="1300" b="1">
+              <a:rPr sz="1000" b="1">
                 <a:solidFill>
                   <a:srgbClr val="767676"/>
                 </a:solidFill>
@@ -9955,8 +10043,8 @@
         </p:nvSpPr>
         <p:spPr>
           <a:xfrm>
-            <a:off x="975335" y="3223260"/>
-            <a:ext cx="10241023" cy="685800"/>
+            <a:off x="1463003" y="3154680"/>
+            <a:ext cx="9265688" cy="822960"/>
           </a:xfrm>
           <a:prstGeom prst="rect">
             <a:avLst/>
@@ -9969,9 +10057,9 @@
           </a:bodyPr>
           <a:lstStyle/>
           <a:p>
-            <a:pPr algn="l"/>
-            <a:r>
-              <a:rPr sz="2600" b="1">
+            <a:pPr algn="ctr"/>
+            <a:r>
+              <a:rPr sz="2800" b="1">
                 <a:solidFill>
                   <a:srgbClr val="1A1A1A"/>
                 </a:solidFill>
@@ -9979,6 +10067,50 @@
               </a:rPr>
               <a:t>7. 조회·결과형 — 대표 HDP-CUL0186</a:t>
             </a:r>
+          </a:p>
+        </p:txBody>
+      </p:sp>
+      <p:sp>
+        <p:nvSpPr>
+          <p:cNvPr id="5" name="Rectangle 4"/>
+          <p:cNvSpPr/>
+          <p:nvPr/>
+        </p:nvSpPr>
+        <p:spPr>
+          <a:xfrm>
+            <a:off x="5608179" y="4114800"/>
+            <a:ext cx="975335" cy="27432"/>
+          </a:xfrm>
+          <a:prstGeom prst="rect">
+            <a:avLst/>
+          </a:prstGeom>
+          <a:solidFill>
+            <a:srgbClr val="1A1A1A"/>
+          </a:solidFill>
+          <a:ln>
+            <a:noFill/>
+          </a:ln>
+          <a:effectLst/>
+        </p:spPr>
+        <p:style>
+          <a:lnRef idx="1">
+            <a:schemeClr val="accent1"/>
+          </a:lnRef>
+          <a:fillRef idx="3">
+            <a:schemeClr val="accent1"/>
+          </a:fillRef>
+          <a:effectRef idx="2">
+            <a:schemeClr val="accent1"/>
+          </a:effectRef>
+          <a:fontRef idx="minor">
+            <a:schemeClr val="lt1"/>
+          </a:fontRef>
+        </p:style>
+        <p:txBody>
+          <a:bodyPr rtlCol="0" anchor="ctr"/>
+          <a:lstStyle/>
+          <a:p>
+            <a:pPr algn="ctr"/>
           </a:p>
         </p:txBody>
       </p:sp>
@@ -12940,8 +13072,8 @@
         </p:nvSpPr>
         <p:spPr>
           <a:xfrm>
-            <a:off x="975335" y="2880360"/>
-            <a:ext cx="10241023" cy="548640"/>
+            <a:off x="487667" y="137160"/>
+            <a:ext cx="4876678" cy="308610"/>
           </a:xfrm>
           <a:prstGeom prst="rect">
             <a:avLst/>
@@ -12956,7 +13088,7 @@
           <a:p>
             <a:pPr algn="l"/>
             <a:r>
-              <a:rPr sz="1300" b="1">
+              <a:rPr sz="1000" b="1">
                 <a:solidFill>
                   <a:srgbClr val="767676"/>
                 </a:solidFill>
@@ -12975,8 +13107,8 @@
         </p:nvSpPr>
         <p:spPr>
           <a:xfrm>
-            <a:off x="975335" y="3223260"/>
-            <a:ext cx="10241023" cy="685800"/>
+            <a:off x="1463003" y="3154680"/>
+            <a:ext cx="9265688" cy="822960"/>
           </a:xfrm>
           <a:prstGeom prst="rect">
             <a:avLst/>
@@ -12989,9 +13121,9 @@
           </a:bodyPr>
           <a:lstStyle/>
           <a:p>
-            <a:pPr algn="l"/>
-            <a:r>
-              <a:rPr sz="2600" b="1">
+            <a:pPr algn="ctr"/>
+            <a:r>
+              <a:rPr sz="2800" b="1">
                 <a:solidFill>
                   <a:srgbClr val="1A1A1A"/>
                 </a:solidFill>
@@ -12999,6 +13131,50 @@
               </a:rPr>
               <a:t>8. 예외·안내형 — 대표 HDP-COM0121</a:t>
             </a:r>
+          </a:p>
+        </p:txBody>
+      </p:sp>
+      <p:sp>
+        <p:nvSpPr>
+          <p:cNvPr id="5" name="Rectangle 4"/>
+          <p:cNvSpPr/>
+          <p:nvPr/>
+        </p:nvSpPr>
+        <p:spPr>
+          <a:xfrm>
+            <a:off x="5608179" y="4114800"/>
+            <a:ext cx="975335" cy="27432"/>
+          </a:xfrm>
+          <a:prstGeom prst="rect">
+            <a:avLst/>
+          </a:prstGeom>
+          <a:solidFill>
+            <a:srgbClr val="1A1A1A"/>
+          </a:solidFill>
+          <a:ln>
+            <a:noFill/>
+          </a:ln>
+          <a:effectLst/>
+        </p:spPr>
+        <p:style>
+          <a:lnRef idx="1">
+            <a:schemeClr val="accent1"/>
+          </a:lnRef>
+          <a:fillRef idx="3">
+            <a:schemeClr val="accent1"/>
+          </a:fillRef>
+          <a:effectRef idx="2">
+            <a:schemeClr val="accent1"/>
+          </a:effectRef>
+          <a:fontRef idx="minor">
+            <a:schemeClr val="lt1"/>
+          </a:fontRef>
+        </p:style>
+        <p:txBody>
+          <a:bodyPr rtlCol="0" anchor="ctr"/>
+          <a:lstStyle/>
+          <a:p>
+            <a:pPr algn="ctr"/>
           </a:p>
         </p:txBody>
       </p:sp>
@@ -18147,8 +18323,8 @@
         </p:nvSpPr>
         <p:spPr>
           <a:xfrm>
-            <a:off x="975335" y="2880360"/>
-            <a:ext cx="10241023" cy="548640"/>
+            <a:off x="487667" y="137160"/>
+            <a:ext cx="4876678" cy="308610"/>
           </a:xfrm>
           <a:prstGeom prst="rect">
             <a:avLst/>
@@ -18163,7 +18339,7 @@
           <a:p>
             <a:pPr algn="l"/>
             <a:r>
-              <a:rPr sz="1300" b="1">
+              <a:rPr sz="1000" b="1">
                 <a:solidFill>
                   <a:srgbClr val="767676"/>
                 </a:solidFill>
@@ -18182,8 +18358,8 @@
         </p:nvSpPr>
         <p:spPr>
           <a:xfrm>
-            <a:off x="975335" y="3223260"/>
-            <a:ext cx="10241023" cy="685800"/>
+            <a:off x="1463003" y="3154680"/>
+            <a:ext cx="9265688" cy="822960"/>
           </a:xfrm>
           <a:prstGeom prst="rect">
             <a:avLst/>
@@ -18196,9 +18372,9 @@
           </a:bodyPr>
           <a:lstStyle/>
           <a:p>
-            <a:pPr algn="l"/>
-            <a:r>
-              <a:rPr sz="2600" b="1">
+            <a:pPr algn="ctr"/>
+            <a:r>
+              <a:rPr sz="2800" b="1">
                 <a:solidFill>
                   <a:srgbClr val="1A1A1A"/>
                 </a:solidFill>
@@ -18206,6 +18382,50 @@
               </a:rPr>
               <a:t>2. 허브·서브메인형 — 대표 HDP-COM0106</a:t>
             </a:r>
+          </a:p>
+        </p:txBody>
+      </p:sp>
+      <p:sp>
+        <p:nvSpPr>
+          <p:cNvPr id="5" name="Rectangle 4"/>
+          <p:cNvSpPr/>
+          <p:nvPr/>
+        </p:nvSpPr>
+        <p:spPr>
+          <a:xfrm>
+            <a:off x="5608179" y="4114800"/>
+            <a:ext cx="975335" cy="27432"/>
+          </a:xfrm>
+          <a:prstGeom prst="rect">
+            <a:avLst/>
+          </a:prstGeom>
+          <a:solidFill>
+            <a:srgbClr val="1A1A1A"/>
+          </a:solidFill>
+          <a:ln>
+            <a:noFill/>
+          </a:ln>
+          <a:effectLst/>
+        </p:spPr>
+        <p:style>
+          <a:lnRef idx="1">
+            <a:schemeClr val="accent1"/>
+          </a:lnRef>
+          <a:fillRef idx="3">
+            <a:schemeClr val="accent1"/>
+          </a:fillRef>
+          <a:effectRef idx="2">
+            <a:schemeClr val="accent1"/>
+          </a:effectRef>
+          <a:fontRef idx="minor">
+            <a:schemeClr val="lt1"/>
+          </a:fontRef>
+        </p:style>
+        <p:txBody>
+          <a:bodyPr rtlCol="0" anchor="ctr"/>
+          <a:lstStyle/>
+          <a:p>
+            <a:pPr algn="ctr"/>
           </a:p>
         </p:txBody>
       </p:sp>
@@ -21470,8 +21690,8 @@
         </p:nvSpPr>
         <p:spPr>
           <a:xfrm>
-            <a:off x="975335" y="2880360"/>
-            <a:ext cx="10241023" cy="548640"/>
+            <a:off x="487667" y="137160"/>
+            <a:ext cx="4876678" cy="308610"/>
           </a:xfrm>
           <a:prstGeom prst="rect">
             <a:avLst/>
@@ -21486,7 +21706,7 @@
           <a:p>
             <a:pPr algn="l"/>
             <a:r>
-              <a:rPr sz="1300" b="1">
+              <a:rPr sz="1000" b="1">
                 <a:solidFill>
                   <a:srgbClr val="767676"/>
                 </a:solidFill>
@@ -21505,8 +21725,8 @@
         </p:nvSpPr>
         <p:spPr>
           <a:xfrm>
-            <a:off x="975335" y="3223260"/>
-            <a:ext cx="10241023" cy="685800"/>
+            <a:off x="1463003" y="3154680"/>
+            <a:ext cx="9265688" cy="822960"/>
           </a:xfrm>
           <a:prstGeom prst="rect">
             <a:avLst/>
@@ -21519,9 +21739,9 @@
           </a:bodyPr>
           <a:lstStyle/>
           <a:p>
-            <a:pPr algn="l"/>
-            <a:r>
-              <a:rPr sz="2600" b="1">
+            <a:pPr algn="ctr"/>
+            <a:r>
+              <a:rPr sz="2800" b="1">
                 <a:solidFill>
                   <a:srgbClr val="1A1A1A"/>
                 </a:solidFill>
@@ -21529,6 +21749,50 @@
               </a:rPr>
               <a:t>3. 목록형 — 대표 HDP-COM0114</a:t>
             </a:r>
+          </a:p>
+        </p:txBody>
+      </p:sp>
+      <p:sp>
+        <p:nvSpPr>
+          <p:cNvPr id="5" name="Rectangle 4"/>
+          <p:cNvSpPr/>
+          <p:nvPr/>
+        </p:nvSpPr>
+        <p:spPr>
+          <a:xfrm>
+            <a:off x="5608179" y="4114800"/>
+            <a:ext cx="975335" cy="27432"/>
+          </a:xfrm>
+          <a:prstGeom prst="rect">
+            <a:avLst/>
+          </a:prstGeom>
+          <a:solidFill>
+            <a:srgbClr val="1A1A1A"/>
+          </a:solidFill>
+          <a:ln>
+            <a:noFill/>
+          </a:ln>
+          <a:effectLst/>
+        </p:spPr>
+        <p:style>
+          <a:lnRef idx="1">
+            <a:schemeClr val="accent1"/>
+          </a:lnRef>
+          <a:fillRef idx="3">
+            <a:schemeClr val="accent1"/>
+          </a:fillRef>
+          <a:effectRef idx="2">
+            <a:schemeClr val="accent1"/>
+          </a:effectRef>
+          <a:fontRef idx="minor">
+            <a:schemeClr val="lt1"/>
+          </a:fontRef>
+        </p:style>
+        <p:txBody>
+          <a:bodyPr rtlCol="0" anchor="ctr"/>
+          <a:lstStyle/>
+          <a:p>
+            <a:pPr algn="ctr"/>
           </a:p>
         </p:txBody>
       </p:sp>
@@ -24400,8 +24664,8 @@
         </p:nvSpPr>
         <p:spPr>
           <a:xfrm>
-            <a:off x="975335" y="2880360"/>
-            <a:ext cx="10241023" cy="548640"/>
+            <a:off x="487667" y="137160"/>
+            <a:ext cx="4876678" cy="308610"/>
           </a:xfrm>
           <a:prstGeom prst="rect">
             <a:avLst/>
@@ -24416,7 +24680,7 @@
           <a:p>
             <a:pPr algn="l"/>
             <a:r>
-              <a:rPr sz="1300" b="1">
+              <a:rPr sz="1000" b="1">
                 <a:solidFill>
                   <a:srgbClr val="767676"/>
                 </a:solidFill>
@@ -24435,8 +24699,8 @@
         </p:nvSpPr>
         <p:spPr>
           <a:xfrm>
-            <a:off x="975335" y="3223260"/>
-            <a:ext cx="10241023" cy="685800"/>
+            <a:off x="1463003" y="3154680"/>
+            <a:ext cx="9265688" cy="822960"/>
           </a:xfrm>
           <a:prstGeom prst="rect">
             <a:avLst/>
@@ -24449,9 +24713,9 @@
           </a:bodyPr>
           <a:lstStyle/>
           <a:p>
-            <a:pPr algn="l"/>
-            <a:r>
-              <a:rPr sz="2600" b="1">
+            <a:pPr algn="ctr"/>
+            <a:r>
+              <a:rPr sz="2800" b="1">
                 <a:solidFill>
                   <a:srgbClr val="1A1A1A"/>
                 </a:solidFill>
@@ -24459,6 +24723,50 @@
               </a:rPr>
               <a:t>4. 정보·안내형 — 대표 HDP-STR0102</a:t>
             </a:r>
+          </a:p>
+        </p:txBody>
+      </p:sp>
+      <p:sp>
+        <p:nvSpPr>
+          <p:cNvPr id="5" name="Rectangle 4"/>
+          <p:cNvSpPr/>
+          <p:nvPr/>
+        </p:nvSpPr>
+        <p:spPr>
+          <a:xfrm>
+            <a:off x="5608179" y="4114800"/>
+            <a:ext cx="975335" cy="27432"/>
+          </a:xfrm>
+          <a:prstGeom prst="rect">
+            <a:avLst/>
+          </a:prstGeom>
+          <a:solidFill>
+            <a:srgbClr val="1A1A1A"/>
+          </a:solidFill>
+          <a:ln>
+            <a:noFill/>
+          </a:ln>
+          <a:effectLst/>
+        </p:spPr>
+        <p:style>
+          <a:lnRef idx="1">
+            <a:schemeClr val="accent1"/>
+          </a:lnRef>
+          <a:fillRef idx="3">
+            <a:schemeClr val="accent1"/>
+          </a:fillRef>
+          <a:effectRef idx="2">
+            <a:schemeClr val="accent1"/>
+          </a:effectRef>
+          <a:fontRef idx="minor">
+            <a:schemeClr val="lt1"/>
+          </a:fontRef>
+        </p:style>
+        <p:txBody>
+          <a:bodyPr rtlCol="0" anchor="ctr"/>
+          <a:lstStyle/>
+          <a:p>
+            <a:pPr algn="ctr"/>
           </a:p>
         </p:txBody>
       </p:sp>
